--- a/defense/湾区杯决赛-南枝大学.pptx
+++ b/defense/湾区杯决赛-南枝大学.pptx
@@ -1285,7 +1285,7 @@
           </a:p>
           <a:p>
             <a:r>
-              <a:t>我们先看任务中的三个难点。第一，标签少，有限的人工样例很难覆盖各种生成方式。第二，数据会变，换一个来源，或者经过压缩、改写，检测线索就可能变化。第三，实际使用时，系统需要一张图、一段文本地给出结果。</a:t>
+              <a:t>检测任务存在三个难点。第一，标签少，有限的人工样例很难覆盖各种生成方式。第二，数据会变，换一个来源，或者经过压缩、改写，检测线索就可能变化。第三，实际使用时，系统需要一张图、一段文本地给出结果。</a:t>
             </a:r>
           </a:p>
           <a:p>

--- a/defense/湾区杯决赛-南枝大学.pptx
+++ b/defense/湾区杯决赛-南枝大学.pptx
@@ -547,7 +547,7 @@
           </a:p>
           <a:p>
             <a:r>
-              <a:t>各位评委好，我们是南枝大学参赛队。下面汇报我们的AI生成内容检测方案，分别面向图像和文本两个赛道。</a:t>
+              <a:t>各位评委好，我们是南枝大学参赛队。下面汇报我们的 AI 生成内容检测方案，分别面向图像和文本两个赛道。</a:t>
             </a:r>
           </a:p>
           <a:p/>
@@ -660,7 +660,7 @@
           </a:p>
           <a:p>
             <a:r>
-              <a:t>这页是最终的两项结果：图像赛道AUC为零点九一八八八七，文本赛道为零点九八一三零一，分别对应两条检测链的复赛离线结果。</a:t>
+              <a:t>这页是最终的两项结果：图像赛道 AUC 为 0.918887，文本赛道为 0.981301，分别对应两条检测链的复赛离线结果。</a:t>
             </a:r>
           </a:p>
           <a:p>
@@ -670,7 +670,7 @@
           </a:p>
           <a:p>
             <a:r>
-              <a:t>这里要说明，AUC衡量的是排序判别能力，不是准确率，也不对应某一个固定阈值。真正使用时，还要看误报和漏报，尤其是正常人工内容被误判的代价。因此，这两项结果是检测基础；进入具体场景，还需要进一步选择阈值。接下来讨论多场景和鲁棒性。</a:t>
+              <a:t>这里要说明，AUC 衡量的是排序判别能力，不是准确率，也不对应某一个固定阈值。真正使用时，还要看误报和漏报，尤其是正常人工内容被误判的代价。因此，这两项结果是检测基础；进入具体场景，还需要进一步选择阈值。接下来讨论多场景和鲁棒性。</a:t>
             </a:r>
           </a:p>
           <a:p/>
@@ -788,7 +788,7 @@
           </a:p>
           <a:p>
             <a:r>
-              <a:t>多场景和对抗鲁棒性，要同时看训练策略与专项测试。图像加入JPEG和翻转增强，目的是减少对固定呈现方式的依赖；文本已有改写训练探索，尝试应对表达变化。</a:t>
+              <a:t>多场景和对抗鲁棒性，要同时看训练策略与专项测试。图像加入 JPEG 和翻转增强，目的是减少对固定呈现方式的依赖；文本已有改写训练探索，尝试应对表达变化。</a:t>
             </a:r>
           </a:p>
           <a:p>
@@ -798,7 +798,7 @@
           </a:p>
           <a:p>
             <a:r>
-              <a:t>已有结果也提醒我们，增加模型不一定提高效果，前面展示的双十四B种子组合就低于五折配置。尺寸先验会受图片规格变化影响，文本截断可能丢失尾部线索。这些都是部署时需要重点检查的条件。下面看效率和资源配置。</a:t>
+              <a:t>已有结果也提醒我们，增加模型不一定提高效果，前面展示的双 14B 种子组合就低于五折配置。尺寸先验会受图片规格变化影响，文本截断可能丢失尾部线索。这些都是部署时需要重点检查的条件。下面看效率和资源配置。</a:t>
             </a:r>
           </a:p>
           <a:p/>
@@ -921,17 +921,17 @@
           </a:p>
           <a:p>
             <a:r>
-              <a:t>部署时，两条链都共享基座、顺序切换分量。图像完成八路打分，文本执行十五个适配器前向。服务用互斥锁保护共享参数，避免请求相互覆盖。</a:t>
-            </a:r>
-          </a:p>
-          <a:p>
-            <a:r>
-              <a:t>图像的已有测试，是两百张图片顺序HTTP请求，共四十七点二秒，平均每张零点二三六秒。文本是五条测试输入，以短文本为主，其中包含空串，HTTP均值零点六八秒。两组条件不同，文本测量来自宿主GPU，不能直接比较，也不能据此推算并发吞吐。批量预测还需要单独测量完整集成的总耗时。</a:t>
-            </a:r>
-          </a:p>
-          <a:p>
-            <a:r>
-              <a:t>计算精度上，图像服务用fp16，特征转fp32进入分类头；离线批量预测用bf16 autocast。文本CUDA加载用bf16。</a:t>
+              <a:t>部署时，两条链都共享基座、顺序切换分量。图像完成 8 路打分，文本执行 15 个适配器前向。服务用互斥锁保护共享参数，避免请求相互覆盖。</a:t>
+            </a:r>
+          </a:p>
+          <a:p>
+            <a:r>
+              <a:t>图像的已有测试，是 200 张图片顺序 HTTP 请求，共 47.2 秒，平均每张 0.236 秒。文本是 5 条测试输入，以短文本为主，其中包含空串，HTTP 均值 0.68 秒。两组条件不同，文本测量来自宿主 GPU，不能直接比较，也不能据此推算并发吞吐。批量预测还需要单独测量完整集成的总耗时。</a:t>
+            </a:r>
+          </a:p>
+          <a:p>
+            <a:r>
+              <a:t>计算精度上，图像服务用 fp16，特征转 fp32 进入分类头；离线批量预测用 bf16 autocast。文本 CUDA 加载用 bf16。</a:t>
             </a:r>
           </a:p>
           <a:p>
@@ -1059,7 +1059,7 @@
           </a:p>
           <a:p>
             <a:r>
-              <a:t>落地时，阈值要根据误报成本来选，不能直接设为零点五。如果场景更重视保护正常创作，就先确定可接受的误报率，再看生成内容的召回。同时监控来源、尺寸、语言和风格变化，必要时重新校准模型与参考表。我们计划先用代表性的业务数据评估，再做小范围试点。最后总结三点。</a:t>
+              <a:t>落地时，阈值要根据误报成本来选，不能直接设为 0.5。如果场景更重视保护正常创作，就先确定可接受的误报率，再看生成内容的召回。同时监控来源、尺寸、语言和风格变化，必要时重新校准模型与参考表。我们计划先用代表性的业务数据评估，再做小范围试点。最后总结三点。</a:t>
             </a:r>
           </a:p>
           <a:p/>
@@ -1264,7 +1264,7 @@
           </a:p>
           <a:p>
             <a:r>
-              <a:t>• 每条赛道1,000标注样例与20,000无标签目标样本。</a:t>
+              <a:t>• 每条赛道 1,000 条初赛标注样例与 20,000 条复赛无标签目标样本。</a:t>
             </a:r>
           </a:p>
           <a:p>
@@ -1531,17 +1531,17 @@
           </a:p>
           <a:p>
             <a:r>
-              <a:t>图像训练有两类来源。上面是转导蒸馏。这里的“转导”，就是把当前两万张无标签目标图像也用于训练。教师先给出软标签，四个CLIP-H学生再结合一千张官方标注学习这些判断。不同训练配置提供多组学生输出。</a:t>
-            </a:r>
-          </a:p>
-          <a:p>
-            <a:r>
-              <a:t>看中间的放大图：骨干权重冻结，LoRA低秩旁路与它并行，再相加、进入分类头。训练只更新LoRA和分类头，加入JPEG增强；监督支路还使用水平翻转。这样减少了更新参数，推理仍要运行完整骨干。</a:t>
-            </a:r>
-          </a:p>
-          <a:p>
-            <a:r>
-              <a:t>下面是独立监督训练，包括bigG三个分量和SigLIP2，使用Tiny-GenImage、GenImage++，并加入官方八百条训练、两百条验证。两类来源补充目标域针对性和视觉多样性。下一步，把八路输出融合。</a:t>
+              <a:t>图像训练有两类来源。上面是转导蒸馏。这里的“转导”，就是把当前 20000 张无标签目标图像也用于训练。教师先给出软标签，4 个 CLIP-H 学生再结合 1000 张官方标注学习这些判断。不同训练配置提供多组学生输出。</a:t>
+            </a:r>
+          </a:p>
+          <a:p>
+            <a:r>
+              <a:t>看中间的放大图：骨干权重冻结，LoRA 低秩旁路与它并行，再相加、进入分类头。训练只更新 LoRA 和分类头，加入 JPEG 增强；监督支路还使用水平翻转。这样减少了更新参数，推理仍要运行完整骨干。</a:t>
+            </a:r>
+          </a:p>
+          <a:p>
+            <a:r>
+              <a:t>下面是独立监督训练，包括 bigG 3 个分量和 SigLIP2，使用 Tiny-GenImage、GenImage++，并加入官方 800 条训练、200 条验证。两类来源补充目标域针对性和视觉多样性。下一步，把 8 路输出融合。</a:t>
             </a:r>
           </a:p>
           <a:p/>
@@ -1664,22 +1664,22 @@
           </a:p>
           <a:p>
             <a:r>
-              <a:t>八路分数不能简单相加。有的模型分数集中在中间，有的接近零或一，直接加权，实际作用就会受到分数尺度影响。</a:t>
-            </a:r>
-          </a:p>
-          <a:p>
-            <a:r>
-              <a:t>我们的做法是先做ECDF映射，把每一路分数转成参考集合中的排序位置，再分成图中的三个槽。四个CLIP-H和SigLIP2等权进入主槽，两个低分辨率bigG进入第二槽，高分辨率bigG进入第三槽。主槽占四分之三，其余权重见图中公式。</a:t>
-            </a:r>
-          </a:p>
-          <a:p>
-            <a:r>
-              <a:t>三槽组合后，再按八比二加入尺寸先验，最后做一次ECDF映射。尺寸先验利用宽高、像素和文件大小，补充图像规格信息。但这类线索依赖数据分布，换场景后要重新评估。</a:t>
-            </a:r>
-          </a:p>
-          <a:p>
-            <a:r>
-              <a:t>推理时，参考表已经固定，一张图片也能查到自己的排序位置。因此，这个输出是检测分数，不能直接理解为“有多少概率是AI生成”。下面看这种组合的效果。</a:t>
+              <a:t>8 路分数不能简单相加。有的模型分数集中在中间，有的接近零或一，直接加权，实际作用就会受到分数尺度影响。</a:t>
+            </a:r>
+          </a:p>
+          <a:p>
+            <a:r>
+              <a:t>我们的做法是先做 ECDF 映射，把每一路分数转成参考集合中的排序位置，再分成图中的三个槽。四个 CLIP-H 和 SigLIP2 等权进入主槽，两个低分辨率 bigG 进入第二槽，高分辨率 bigG 进入第三槽。主槽占四分之三，其余权重见图中公式。</a:t>
+            </a:r>
+          </a:p>
+          <a:p>
+            <a:r>
+              <a:t>三槽组合后，再按八比二加入尺寸先验，最后做一次 ECDF 映射。尺寸先验利用宽高、像素和文件大小，补充图像规格信息。但这类线索依赖数据分布，换场景后要重新评估。</a:t>
+            </a:r>
+          </a:p>
+          <a:p>
+            <a:r>
+              <a:t>推理时，参考表已经固定，一张图片也能查到自己的排序位置。因此，这个输出是检测分数，不能直接理解为“有多少概率是 AI 生成”。下面看这种组合的效果。</a:t>
             </a:r>
           </a:p>
           <a:p/>
@@ -1792,17 +1792,17 @@
           </a:p>
           <a:p>
             <a:r>
-              <a:t>左边的图展示四个主要配置，AUC从约零点九零八提高到约零点九一九，最后两组相差约零点零零一五。这些配置同时调整了基底、权重和训练安排，所以这里展示的是选型结果，不能把提升全部算到某一个设计上。</a:t>
-            </a:r>
-          </a:p>
-          <a:p>
-            <a:r>
-              <a:t>右边再看分量之间的关系。四路CLIP-H的排序比较接近，平均相关约零点九六；主CLIP-H与SigLIP2、以及高分辨率bigG的相关更低，说明它们提供了不同判断。</a:t>
-            </a:r>
-          </a:p>
-          <a:p>
-            <a:r>
-              <a:t>但判断不同，还要有足够的检测能力。我们同时考虑单路效果、分量互补和计算成本，最终保留八路。图像部分讲到这里，接下来介绍文本。</a:t>
+              <a:t>左边的图展示 4 个主要配置，AUC 从约 0.908 提高到约 0.919，最后两组相差约 0.0015。这些配置同时调整了基底、权重和训练安排，所以这里展示的是选型结果，不能把提升全部算到某一个设计上。</a:t>
+            </a:r>
+          </a:p>
+          <a:p>
+            <a:r>
+              <a:t>右边再看分量之间的关系。4 路 CLIP-H 的排序比较接近，平均相关约 0.96；主 CLIP-H 与 SigLIP2、以及高分辨率 bigG 的相关更低，说明它们提供了不同判断。</a:t>
+            </a:r>
+          </a:p>
+          <a:p>
+            <a:r>
+              <a:t>但判断不同，还要有足够的检测能力。我们同时考虑单路效果、分量互补和计算成本，最终保留 8 路。图像部分讲到这里，接下来介绍文本。</a:t>
             </a:r>
           </a:p>
           <a:p/>
@@ -1925,22 +1925,22 @@
           </a:p>
           <a:p>
             <a:r>
-              <a:t>文本侧同样是一千条官方标注，加两万条无标签目标文本。关键是把已有检测分数变成训练信号。</a:t>
-            </a:r>
-          </a:p>
-          <a:p>
-            <a:r>
-              <a:t>请沿左侧实线看：上一代检测器先给两万条文本打分，分数转成排名，再由sigmoid生成软标签。左侧八百条官方硬标签汇入加权损失，软标签同时带上置信权重。冻结语言基座后，更新LoRA和分类头。</a:t>
-            </a:r>
-          </a:p>
-          <a:p>
-            <a:r>
-              <a:t>右边实线表示软标签，范围约零点一二到零点八八；虚线表示权重，中间最低、两端最高为一。官方硬标签权重为二，提供真实监督。这些权重直接作用到二元交叉熵损失。</a:t>
-            </a:r>
-          </a:p>
-          <a:p>
-            <a:r>
-              <a:t>流程图右侧，中间的每折两百条只用于验证，AUC选择检查点；下方的五折折外预测用于融合选型。这样利用目标域数据，也减少中间样本的监督强度，但不能保证教师错误不会传播。下面看最终模型。</a:t>
+              <a:t>文本侧同样是 1000 条官方标注，加 20000 条无标签目标文本。关键是把已有检测分数变成训练信号。</a:t>
+            </a:r>
+          </a:p>
+          <a:p>
+            <a:r>
+              <a:t>请沿左侧实线看：上一代检测器先给 20000 条文本打分，分数转成排名，再由 sigmoid 生成软标签。左侧 800 条官方硬标签汇入加权损失，软标签同时带上置信权重。冻结语言基座后，更新 LoRA 和分类头。</a:t>
+            </a:r>
+          </a:p>
+          <a:p>
+            <a:r>
+              <a:t>右边实线表示软标签，范围约 0.12 到 0.88；虚线表示权重，中间最低、两端最高为一。官方硬标签权重为二，提供真实监督。这些权重直接作用到二元交叉熵损失。</a:t>
+            </a:r>
+          </a:p>
+          <a:p>
+            <a:r>
+              <a:t>流程图右侧，中间的每折 200 条只用于验证，AUC 选择检查点；下方的五折折外预测用于融合选型。这样利用目标域数据，也减少中间样本的监督强度，但不能保证教师错误不会传播。下面看最终模型。</a:t>
             </a:r>
           </a:p>
           <a:p/>
@@ -2063,17 +2063,17 @@
           </a:p>
           <a:p>
             <a:r>
-              <a:t>最终方案以Qwen2.5十四B为主、七B为辅。请从模型树上方往下看：两个共享基座，分出三组五折。十四B主分支有五个适配器；七B两个辅助分组各有五个，共十五个。两组七B并不是一次十折验证。</a:t>
-            </a:r>
-          </a:p>
-          <a:p>
-            <a:r>
-              <a:t>推理时，基座常驻，适配器依次切换。十四B运行五次，七B运行十次，底部先分别聚合，再按百分之九十和百分之十汇合。</a:t>
-            </a:r>
-          </a:p>
-          <a:p>
-            <a:r>
-              <a:t>再看右边的结果：十四B五折组合已经达到约零点九八一一，加入七B后约为零点九八一三，提升约零点零零零二三。这个收益需要和额外计算一起衡量。因此，辅助分支是否保留，要看它能否补充主模型的判断。下一页解释同一套模型如何处理整批数据和单条请求。</a:t>
+              <a:t>最终方案以 Qwen2.5-14B 为主、7B 为辅。请从模型树上方往下看：2 个共享基座，分出 3 组五折。14B 主分支有 5 个适配器；7B 两个辅助分组各有 5 个，共 15 个。两组 7B 并不是一次十折验证。</a:t>
+            </a:r>
+          </a:p>
+          <a:p>
+            <a:r>
+              <a:t>推理时，基座常驻，适配器依次切换。14B 运行 5 次，7B 运行 10 次，底部先分别聚合，再按 90% 和 10%汇合。</a:t>
+            </a:r>
+          </a:p>
+          <a:p>
+            <a:r>
+              <a:t>再看右边的结果：14B 五折组合已经达到约 0.981069，加入 7B 后约为 0.981301，提升约 0.000232。这个收益需要和额外计算一起衡量。因此，辅助分支是否保留，要看它能否补充主模型的判断。下一页解释同一套模型如何处理整批数据和单条请求。</a:t>
             </a:r>
           </a:p>
           <a:p/>
@@ -2196,17 +2196,17 @@
           </a:p>
           <a:p>
             <a:r>
-              <a:t>这里有两条计算路径。左边沿三个rank节点往下看：各组预测先转成排名百分位，再以九成、百分之五、百分之五汇合，最后对整批结果重新排名。</a:t>
-            </a:r>
-          </a:p>
-          <a:p>
-            <a:r>
-              <a:t>右边从顶部输入往下看，在线服务一次只收到一段文本。十四B的五个logit，也就是模型原始输出，先平均，再做sigmoid；七B的十个logit也共同平均，再做一次sigmoid。两侧分数最后才按九比一加权。</a:t>
-            </a:r>
-          </a:p>
-          <a:p>
-            <a:r>
-              <a:t>这个顺序很关键，平均和sigmoid不能交换。这两条路径使用的计算空间不同，也就不能直接认定检测效果相同。在线输入还会截断到五百一十二个token，因此实际评测要对应服务的计算方式和输入条件。下面汇总两条链的结果。</a:t>
+              <a:t>这里有 2 条计算路径。左边沿 3 个 rank 节点往下看：各组预测先转成排名百分位，再以 90%、5%、5%汇合，最后对整批结果重新排名。</a:t>
+            </a:r>
+          </a:p>
+          <a:p>
+            <a:r>
+              <a:t>右边从顶部输入往下看，在线服务一次只收到一段文本。14B 的 5 个 logit，也就是模型原始输出，先平均，再做 sigmoid；7B 的 10 个 logit 也共同平均，再做一次 sigmoid。两侧分数最后才按 9:1 加权。</a:t>
+            </a:r>
+          </a:p>
+          <a:p>
+            <a:r>
+              <a:t>这个顺序很关键，平均和 sigmoid 不能交换。这两条路径使用的计算空间不同，也就不能直接认定检测效果相同。在线输入还会截断到 512 个 token，因此实际评测要对应服务的计算方式和输入条件。下面汇总两条链的结果。</a:t>
             </a:r>
           </a:p>
           <a:p/>
